--- a/Planning docs/Slides/lesson-22-2-teacher-slides.pptx
+++ b/Planning docs/Slides/lesson-22-2-teacher-slides.pptx
@@ -517,7 +517,7 @@
           <a:p>
             <a:r>
               <a:rPr lang="en-US" dirty="0"/>
-              <a:t>Lesson 22.2. Reading: Synthesis: Theme.</a:t>
+              <a:t>Lesson 22.2. Reading: Theme.</a:t>
             </a:r>
             <a:endParaRPr lang="en-US" dirty="0"/>
           </a:p>
@@ -2320,7 +2320,7 @@
                 <a:ea typeface="Calibri" pitchFamily="34" charset="-122"/>
                 <a:cs typeface="Calibri" pitchFamily="34" charset="-120"/>
               </a:rPr>
-              <a:t>Lesson 22.2  ·  Synthesis: Theme</a:t>
+              <a:t>Lesson 22.2  ·  Theme</a:t>
             </a:r>
             <a:endParaRPr lang="en-US" sz="2000" dirty="0"/>
           </a:p>
@@ -5024,7 +5024,7 @@
                 <a:ea typeface="Calibri" pitchFamily="34" charset="-122"/>
                 <a:cs typeface="Calibri" pitchFamily="34" charset="-120"/>
               </a:rPr>
-              <a:t>Synthesis: Theme</a:t>
+              <a:t>Theme</a:t>
             </a:r>
             <a:endParaRPr lang="en-US" sz="2600" dirty="0"/>
           </a:p>
@@ -5102,7 +5102,7 @@
                 <a:ea typeface="Calibri" pitchFamily="34" charset="-122"/>
                 <a:cs typeface="Calibri" pitchFamily="34" charset="-120"/>
               </a:rPr>
-              <a:t>•  Good readers look for the lesson the author is teaching. Today we name the theme of The Whipping Boy — in our own words — and find two events that prove it.</a:t>
+              <a:t>•  State the theme of The Whipping Boy in one sentence — a general truth, not a plot summary.</a:t>
             </a:r>
             <a:endParaRPr lang="en-US" sz="1500" dirty="0"/>
           </a:p>
@@ -5119,24 +5119,7 @@
                 <a:ea typeface="Calibri" pitchFamily="34" charset="-122"/>
                 <a:cs typeface="Calibri" pitchFamily="34" charset="-120"/>
               </a:rPr>
-              <a:t>•  Which creatures in this list are given a human feeling or a human action? Name two.</a:t>
-            </a:r>
-            <a:endParaRPr lang="en-US" sz="1500" dirty="0"/>
-          </a:p>
-          <a:p>
-            <a:pPr indent="0" marL="0">
-              <a:buNone/>
-            </a:pPr>
-            <a:r>
-              <a:rPr lang="en-US" sz="1500" dirty="0">
-                <a:solidFill>
-                  <a:srgbClr val="1E293B"/>
-                </a:solidFill>
-                <a:latin typeface="Calibri" pitchFamily="34" charset="0"/>
-                <a:ea typeface="Calibri" pitchFamily="34" charset="-122"/>
-                <a:cs typeface="Calibri" pitchFamily="34" charset="-120"/>
-              </a:rPr>
-              <a:t>•  Look at the letters around the dot in each word. Count: vowel, consonant, consonant, vowel. That's the VCCV pattern .</a:t>
+              <a:t>•  Think of two events that prove your theme: one from early in the book, one from late.</a:t>
             </a:r>
             <a:endParaRPr lang="en-US" sz="1500" dirty="0"/>
           </a:p>
@@ -6292,7 +6275,7 @@
                 <a:ea typeface="Calibri" pitchFamily="34" charset="-122"/>
                 <a:cs typeface="Calibri" pitchFamily="34" charset="-120"/>
               </a:rPr>
-              <a:t>Synthesis: Theme</a:t>
+              <a:t>Theme</a:t>
             </a:r>
             <a:endParaRPr lang="en-US" sz="2000" dirty="0"/>
           </a:p>
